--- a/MH/MH_Robotics_IR_Internal_QA.pptx
+++ b/MH/MH_Robotics_IR_Internal_QA.pptx
@@ -813,7 +813,7 @@
           </a:p>
           <a:p>
             <a:r>
-              <a:t>- 우선순위: 팀 정보 → 상용 Gripper 기술 기준선 → 예약금 등 고객 행동 Evidence</a:t>
+              <a:t>- 우선순위: 팀 정보 → 상용 Gripper 기술 비교 기준 → 예약금 등 고객 행동 Evidence</a:t>
             </a:r>
           </a:p>
         </p:txBody>
@@ -5343,7 +5343,7 @@
                           <a:ea typeface="Noto Sans KR"/>
                           <a:cs typeface="Noto Sans KR"/>
                         </a:rPr>
-                        <a:t>동작이 적고 반복되며 (Pick · Place · Insert · Remove), 작업영역이 정해져 있고 (싱크 · 식세기 · 수납), 물체 범위가 닫혀 있어 기술 검증이 가능함. 매일 쓰고 주방 리모델링 · 입주라는 구매 계기가 있어 사업 검증도 가능. CLEAN → COOK 확장 경로.</a:t>
+                        <a:t>동작이 적고 반복되며 (Pick · Place · Insert · Remove), 작업영역이 정해져 있고 (싱크 · 식세기 · 수납), 다룰 식기 종류가 한정돼 있어 기술 검증이 가능함. 매일 쓰고 주방 리모델링 · 입주라는 구매 계기가 있어 사업 검증도 가능. CLEAN → COOK 확장 경로.</a:t>
                       </a:r>
                     </a:p>
                   </a:txBody>
@@ -5550,7 +5550,7 @@
                           <a:ea typeface="Noto Sans KR"/>
                           <a:cs typeface="Noto Sans KR"/>
                         </a:rPr>
-                        <a:t>식세기 랙 · 서랍 · 상부장 작업은 방향 제어가 필요해 6축 Arm이 맞음. 전용 기계는 식기 · 주방마다 재설계, 이동형은 낮은 작업점 · 가격 · 안전 부담. Arm은 Skill · Tool로 ASSIST · COOK 확장.</a:t>
+                        <a:t>식세기 랙 · 서랍 · 상부장 작업은 위치 · 자세 제어가 필요해 6축 Arm이 맞음. 전용 기계는 식기 · 주방마다 재설계, 이동형은 하단 작업 · 가격 · 안전 부담. Arm은 Skill · Tool로 ASSIST · COOK 확장.</a:t>
                       </a:r>
                     </a:p>
                   </a:txBody>
@@ -6171,7 +6171,7 @@
                           <a:ea typeface="Noto Sans KR"/>
                           <a:cs typeface="Noto Sans KR"/>
                         </a:rPr>
-                        <a:t>같은 Arm · Hand · Calibration · Safety를 쓰고, 추가되는 것은 Skill · Tool · 식품접촉 규격 · 열/액체 안전. 24개월 범위는 CLEAN, ASSIST가 중간 단계, COOK은 장기 R&amp;D (FUTURE). 공개 범용 모델 (π0.5) 발전이 Skill 확장 속도를 높일 수 있음.</a:t>
+                        <a:t>같은 Arm · Hand · Calibration · Safety를 쓰고, 추가 항목은 Skill · Tool · 식품접촉 규격 · 열/액체 안전. 24개월 범위는 CLEAN, ASSIST가 중간 단계, COOK은 장기 R&amp;D (FUTURE). 공개 범용 모델 (π0.5) 발전이 Skill 확장 속도를 높일 수 있음.</a:t>
                       </a:r>
                     </a:p>
                   </a:txBody>
@@ -6378,7 +6378,7 @@
                           <a:ea typeface="Noto Sans KR"/>
                           <a:cs typeface="Noto Sans KR"/>
                         </a:rPr>
-                        <a:t>처음엔 상용 Gripper로 시작해 기준선을 잡고 M6에 30종 식기로 비교. 자체 Hand 가설: 얇은 접시 Edge + 컵 · 그릇 감싸기를 Tool 교체 없이, 젖은 표면 Slip 감지, 교체형 식품접촉 Pad (위생 · 소모품), 목표 원가. 우위가 없으면 Buy로 전환 (중단 기준).</a:t>
+                        <a:t>처음엔 상용 Gripper로 시작해 비교 기준을 잡고 M6에 30종 식기로 비교. 자체 Hand 가설: 얇은 접시 Edge + 컵 · 그릇 감싸쥐기를 Tool 교체 없이, 젖은 표면 미끄럼 감지, 교체형 식품접촉 Pad (위생 · 소모품), 목표 원가. 우위가 없으면 Buy로 전환 (중단 기준).</a:t>
                       </a:r>
                     </a:p>
                   </a:txBody>
@@ -6544,7 +6544,7 @@
                           <a:ea typeface="Noto Sans KR"/>
                           <a:cs typeface="Noto Sans KR"/>
                         </a:rPr>
-                        <a:t>Kitchen마다 다른데 실제 적용 가능한가?</a:t>
+                        <a:t>주방마다 다른데 실제 적용 가능한가?</a:t>
                       </a:r>
                     </a:p>
                   </a:txBody>
@@ -6585,7 +6585,7 @@
                           <a:ea typeface="Noto Sans KR"/>
                           <a:cs typeface="Noto Sans KR"/>
                         </a:rPr>
-                        <a:t>모든 주방이 아니라 호환 주방부터. 적용률 Remodeling 60% · Retrofit 40% (가정) → 평면 30개 분석 (M6). Calibration (Mapping · 기준점 · Template)으로 재배치, M18 주방 3종 하락 ≤ 10%p · ≤ 4시간.</a:t>
+                        <a:t>모든 주방이 아니라 호환 주방부터. 적용률 Remodeling 60% · Retrofit 40% (가정) → 평면 30개 분석 (M6). Calibration (Mapping · 기준점 · Template)으로 타 주방 적용, M18 주방 3종 하락 ≤ 10%p · ≤ 4시간.</a:t>
                       </a:r>
                     </a:p>
                   </a:txBody>
@@ -7269,7 +7269,7 @@
                           <a:ea typeface="Noto Sans KR"/>
                           <a:cs typeface="Noto Sans KR"/>
                         </a:rPr>
-                        <a:t>Remodeling은 주방 공사와 동시에 진행 (Interface 증분 450만원 = Premium 주방 2,000~4,000만원의 약 11~23%). Retrofit은 Compact Mount · Dock만 (150만원). New-build는 설계 단계 반영. 일반 시공은 Partner.</a:t>
+                        <a:t>Remodeling은 주방 공사와 동시에 진행 (Interface 증분 450만원 = Premium 주방 2,000~4,000만원의 약 11~23%). Retrofit은 Compact Mount · Dock만 (150만원). New-build는 설계 단계 반영. 인테리어 시공은 Partner.</a:t>
                       </a:r>
                     </a:p>
                   </a:txBody>
@@ -7476,7 +7476,7 @@
                           <a:ea typeface="Noto Sans KR"/>
                           <a:cs typeface="Noto Sans KR"/>
                         </a:rPr>
-                        <a:t>아님. Remodeling 1세대 5년 매출 2,418만원 중 Interface는 450만원 (약 19%), 나머지는 Robot · Care · 소모품 · Skill. 시공은 Partner, MH Core는 Robot · Hand · Skill · Calibration · Interface 표준 · Safety · Commissioning.</a:t>
+                        <a:t>아님. Remodeling 세대당 5년 매출 2,418만원 중 Interface는 450만원 (약 19%), 나머지는 Robot · Care · 소모품 · Skill. 시공은 Partner, MH Core는 Robot · Hand · Skill · Calibration · Interface 표준 · Safety · 시운전.</a:t>
                       </a:r>
                     </a:p>
                   </a:txBody>
@@ -7683,7 +7683,7 @@
                           <a:ea typeface="Noto Sans KR"/>
                           <a:cs typeface="Noto Sans KR"/>
                         </a:rPr>
-                        <a:t>Care 원가 Build-up (Y3): 방문 2회 × 11만원 + 고장 0.6회 × 18만원 + Cloud 4만원 = 연 36.8만원 vs Care 요금 48만원 → 마진 23% (Y3) → 44% (Y5, 원격진단 · 동선 밀도). 고장 1.2회/년 (Warranty 6% 동반) 시 1세대 5년 −84만원</a:t>
+                        <a:t>Care 원가 Build-up (Y3): 방문 2회 × 11만원 + 고장 0.6회 × 18만원 + Cloud 4만원 = 연 36.8만원 vs Care 요금 48만원 → 마진 23% (Y3) → 44% (Y5, 원격진단 · 동선 밀도). 고장 1.2회/년 (Warranty 6% 동반) 시 세대당 5년 −84만원</a:t>
                       </a:r>
                     </a:p>
                   </a:txBody>
@@ -7765,7 +7765,7 @@
                           <a:ea typeface="Noto Sans KR"/>
                           <a:cs typeface="Noto Sans KR"/>
                         </a:rPr>
-                        <a:t>M24 가정 3세대 실측 필요</a:t>
+                        <a:t>M24 실거주 3세대 실측 필요</a:t>
                       </a:r>
                     </a:p>
                   </a:txBody>
@@ -7890,7 +7890,7 @@
                           <a:ea typeface="Noto Sans KR"/>
                           <a:cs typeface="Noto Sans KR"/>
                         </a:rPr>
-                        <a:t>Pilot만 MH 직접 보유, Y4부터 Rental · Capital Partner가 자산 보유 (ASP의 88%에 매입, MH 서비스료 월 6만원, Partner IRR 약 13.1%). MH B/S 부담 지양. 단, Partner 단순 회수 약 49개월 &gt; 요구 36개월 (가정) → 매입가율 · 서비스료 · 기간 협의 (M24)</a:t>
+                        <a:t>Pilot만 MH 직접 보유, Y4부터 Rental · Capital Partner가 자산 보유 (ASP의 88%에 매입, MH 서비스료 월 6만원, Partner IRR 약 13.1%). MH B/S 부담 지양. 단, Partner 단순 회수기간 약 49개월 &gt; 요구 36개월 (가정) → 매입가율 · 서비스료 · 기간 협의 (M24)</a:t>
                       </a:r>
                     </a:p>
                   </a:txBody>
@@ -8511,7 +8511,7 @@
                           <a:ea typeface="Noto Sans KR"/>
                           <a:cs typeface="Noto Sans KR"/>
                         </a:rPr>
-                        <a:t>위협이자 기회. 공개 범용 모델은 MH 실행층에 활용 가능. Humanoid도 주방에서는 낮은 작업점 · 위생 · 안전 · 가격 ($20,000 · 월 $499) 제약이 있음. MH의 Interface · Skill · Calibration 자산은 다른 Robot Platform에도 적용 가능 (Interface 표준 제공자 Position).</a:t>
+                        <a:t>위협이자 기회. 공개 범용 모델은 MH Manipulation Layer에 활용 가능. Humanoid도 주방에서는 하단 작업 · 위생 · 안전 · 가격 ($20,000 · 월 $499) 제약이 있음. MH의 Interface · Skill · Calibration 자산은 다른 Robot Platform에도 적용 가능 (Interface 표준 제공자 Position).</a:t>
                       </a:r>
                     </a:p>
                   </a:txBody>
@@ -10023,7 +10023,7 @@
                           <a:ea typeface="Noto Sans KR"/>
                           <a:cs typeface="Noto Sans KR"/>
                         </a:rPr>
-                        <a:t>가정 3세대 CLEAN ≥ 90% · 유료 전환 ≥ 2세대 · 주방 3종 Transfer ≤ 10%p · Calibration ≤ 4시간 · BOM · 설치 · Service 원가 실측 · WTP n ≥ 300 (1,490만원 ≥ 30%) · Partner 조건 (리모델링 1 · 렌탈/캐피탈 1) · 출원 5건.</a:t>
+                        <a:t>실거주 3세대 CLEAN ≥ 90% · 유료 전환 ≥ 2세대 · 주방 3종 적용 하락 ≤ 10%p · Calibration ≤ 4시간 · BOM · 설치 · Service 원가 실측 · WTP n ≥ 300 (1,490만원 ≥ 30%) · Partner 조건 (리모델링 1 · 렌탈/캐피탈 1) · 출원 5건.</a:t>
                       </a:r>
                     </a:p>
                   </a:txBody>
@@ -10230,7 +10230,7 @@
                           <a:ea typeface="Noto Sans KR"/>
                           <a:cs typeface="Noto Sans KR"/>
                         </a:rPr>
-                        <a:t>[Founder 정보 필요] — 현재 답할 수 없음. 필요한 역량은 로봇 조작 (Hand · Skill), 주방 · 건축 설치 (Interface · 시공 Partner), 고객 · 파트너 영업의 세 축. 이 칸이 채워지기 전에는 투자 판단 불가.</a:t>
+                        <a:t>[Founder 정보 필요] — 현재 답할 수 없음. 필요한 역량은 로봇 조작 (Hand · Skill), 주방 · 건축 시공 (Interface · 시공 Partner), 고객 · 파트너 영업의 세 축. 이 칸이 채워지기 전에는 투자 판단 불가.</a:t>
                       </a:r>
                     </a:p>
                   </a:txBody>
@@ -10580,7 +10580,7 @@
         </p:nvGraphicFramePr>
         <p:xfrm>
           <a:off x="685800" y="1790567"/>
-          <a:ext cx="6675120" cy="3764878"/>
+          <a:ext cx="6675120" cy="3621439"/>
         </p:xfrm>
         <a:graphic>
           <a:graphicData uri="http://schemas.openxmlformats.org/drawingml/2006/table">
@@ -11036,7 +11036,7 @@
                           <a:ea typeface="Noto Sans KR"/>
                           <a:cs typeface="Noto Sans KR"/>
                         </a:rPr>
-                        <a:t>30세대 Time-diary</a:t>
+                        <a:t>30세대 시간일지 조사</a:t>
                       </a:r>
                     </a:p>
                   </a:txBody>
@@ -11202,7 +11202,7 @@
                           <a:ea typeface="Noto Sans KR"/>
                           <a:cs typeface="Noto Sans KR"/>
                         </a:rPr>
-                        <a:t>인터뷰 50명 → 조사 n ≥ 300 · 예약금 Test</a:t>
+                        <a:t>인터뷰 50명 → 조사 n ≥ 300 · 예약금 테스트</a:t>
                       </a:r>
                     </a:p>
                   </a:txBody>
@@ -11598,7 +11598,7 @@
                   </a:tcPr>
                 </a:tc>
               </a:tr>
-              <a:tr h="350885">
+              <a:tr h="207446">
                 <a:tc>
                   <a:txBody>
                     <a:bodyPr wrap="square"/>
@@ -11618,7 +11618,7 @@
                           <a:ea typeface="Noto Sans KR"/>
                           <a:cs typeface="Noto Sans KR"/>
                         </a:rPr>
-                        <a:t>주방 Transfer · Calibration 시간</a:t>
+                        <a:t>타 주방 적용 · Calibration 시간</a:t>
                       </a:r>
                     </a:p>
                   </a:txBody>
@@ -11825,7 +11825,7 @@
                           <a:ea typeface="Noto Sans KR"/>
                           <a:cs typeface="Noto Sans KR"/>
                         </a:rPr>
-                        <a:t>확보 5종 (1종 수용)</a:t>
+                        <a:t>확보 5종 (1종 가능)</a:t>
                       </a:r>
                     </a:p>
                   </a:txBody>
@@ -12198,7 +12198,7 @@
                           <a:ea typeface="Noto Sans KR"/>
                           <a:cs typeface="Noto Sans KR"/>
                         </a:rPr>
-                        <a:t>가정 3세대 실측</a:t>
+                        <a:t>실거주 3세대 실측</a:t>
                       </a:r>
                     </a:p>
                   </a:txBody>
@@ -16677,7 +16677,7 @@
                 <a:ea typeface="Noto Sans KR"/>
                 <a:cs typeface="Noto Sans KR"/>
               </a:rPr>
-              <a:t>로봇 조작 · Hand 개발 실적과 주방 · 건축 설치 실적을 가진 2인 이상 전업 Founding Team (지분 · 역할 확정)</a:t>
+              <a:t>로봇 조작 · Hand 개발 실적과 주방 · 건축 시공 실적을 가진 2인 이상 전업 Founding Team (지분 · 역할 확정)</a:t>
             </a:r>
           </a:p>
         </p:txBody>
@@ -17987,7 +17987,7 @@
                           <a:ea typeface="Noto Sans KR"/>
                           <a:cs typeface="Noto Sans KR"/>
                         </a:rPr>
-                        <a:t>아파트 약 1,328만호 · 1세대 5년 Contribution · Seed 범위 · 인시</a:t>
+                        <a:t>아파트 약 1,328만호 · 세대당 5년 공헌이익 · Seed 범위 · 인시</a:t>
                       </a:r>
                     </a:p>
                   </a:txBody>
@@ -18319,7 +18319,7 @@
                           <a:ea typeface="Noto Sans KR"/>
                           <a:cs typeface="Noto Sans KR"/>
                         </a:rPr>
-                        <a:t>가정 실증 ≥ 90% · Calibration ≤ 4시간 · 출원 5건 · 설치 물량</a:t>
+                        <a:t>실거주 실증 ≥ 90% · Calibration ≤ 4시간 · 출원 5건 · 설치 물량</a:t>
                       </a:r>
                     </a:p>
                   </a:txBody>
